--- a/RVCE_MergeMind.pptx
+++ b/RVCE_MergeMind.pptx
@@ -5,7 +5,7 @@
     <p:sldMasterId id="2147483648" r:id="rId1"/>
   </p:sldMasterIdLst>
   <p:notesMasterIdLst>
-    <p:notesMasterId r:id="rId13"/>
+    <p:notesMasterId r:id="rId15"/>
   </p:notesMasterIdLst>
   <p:sldIdLst>
     <p:sldId id="374" r:id="rId2"/>
@@ -14,11 +14,13 @@
     <p:sldId id="376" r:id="rId5"/>
     <p:sldId id="384" r:id="rId6"/>
     <p:sldId id="377" r:id="rId7"/>
-    <p:sldId id="378" r:id="rId8"/>
-    <p:sldId id="379" r:id="rId9"/>
-    <p:sldId id="380" r:id="rId10"/>
-    <p:sldId id="382" r:id="rId11"/>
-    <p:sldId id="383" r:id="rId12"/>
+    <p:sldId id="386" r:id="rId8"/>
+    <p:sldId id="385" r:id="rId9"/>
+    <p:sldId id="378" r:id="rId10"/>
+    <p:sldId id="379" r:id="rId11"/>
+    <p:sldId id="380" r:id="rId12"/>
+    <p:sldId id="382" r:id="rId13"/>
+    <p:sldId id="383" r:id="rId14"/>
   </p:sldIdLst>
   <p:sldSz cx="12192000" cy="6858000"/>
   <p:notesSz cx="6858000" cy="9144000"/>
@@ -633,6 +635,174 @@
     </p:spTree>
     <p:extLst>
       <p:ext uri="{BB962C8B-B14F-4D97-AF65-F5344CB8AC3E}">
+        <p14:creationId xmlns:p14="http://schemas.microsoft.com/office/powerpoint/2010/main" val="2945130687"/>
+      </p:ext>
+    </p:extLst>
+  </p:cSld>
+  <p:clrMapOvr>
+    <a:masterClrMapping/>
+  </p:clrMapOvr>
+</p:notes>
+</file>
+
+<file path=ppt/notesSlides/notesSlide11.xml><?xml version="1.0" encoding="utf-8"?>
+<p:notes xmlns:a="http://schemas.openxmlformats.org/drawingml/2006/main" xmlns:r="http://schemas.openxmlformats.org/officeDocument/2006/relationships" xmlns:p="http://schemas.openxmlformats.org/presentationml/2006/main">
+  <p:cSld>
+    <p:spTree>
+      <p:nvGrpSpPr>
+        <p:cNvPr id="1" name=""/>
+        <p:cNvGrpSpPr/>
+        <p:nvPr/>
+      </p:nvGrpSpPr>
+      <p:grpSpPr>
+        <a:xfrm>
+          <a:off x="0" y="0"/>
+          <a:ext cx="0" cy="0"/>
+          <a:chOff x="0" y="0"/>
+          <a:chExt cx="0" cy="0"/>
+        </a:xfrm>
+      </p:grpSpPr>
+      <p:sp>
+        <p:nvSpPr>
+          <p:cNvPr id="2" name="Slide Image Placeholder 1"/>
+          <p:cNvSpPr>
+            <a:spLocks noGrp="1" noRot="1" noChangeAspect="1"/>
+          </p:cNvSpPr>
+          <p:nvPr>
+            <p:ph type="sldImg"/>
+          </p:nvPr>
+        </p:nvSpPr>
+        <p:spPr/>
+      </p:sp>
+      <p:sp>
+        <p:nvSpPr>
+          <p:cNvPr id="3" name="Notes Placeholder 2"/>
+          <p:cNvSpPr>
+            <a:spLocks noGrp="1"/>
+          </p:cNvSpPr>
+          <p:nvPr>
+            <p:ph type="body" idx="1"/>
+          </p:nvPr>
+        </p:nvSpPr>
+        <p:spPr/>
+        <p:txBody>
+          <a:bodyPr/>
+          <a:lstStyle/>
+          <a:p>
+            <a:endParaRPr lang="en-US" dirty="0"/>
+          </a:p>
+        </p:txBody>
+      </p:sp>
+      <p:sp>
+        <p:nvSpPr>
+          <p:cNvPr id="4" name="Slide Number Placeholder 3"/>
+          <p:cNvSpPr>
+            <a:spLocks noGrp="1"/>
+          </p:cNvSpPr>
+          <p:nvPr>
+            <p:ph type="sldNum" sz="quarter" idx="10"/>
+          </p:nvPr>
+        </p:nvSpPr>
+        <p:spPr/>
+        <p:txBody>
+          <a:bodyPr/>
+          <a:lstStyle/>
+          <a:p>
+            <a:fld id="{F7021451-1387-4CA6-816F-3879F97B5CBC}" type="slidenum">
+              <a:rPr lang="en-US"/>
+              <a:t>12</a:t>
+            </a:fld>
+            <a:endParaRPr lang="en-US"/>
+          </a:p>
+        </p:txBody>
+      </p:sp>
+    </p:spTree>
+    <p:extLst>
+      <p:ext uri="{BB962C8B-B14F-4D97-AF65-F5344CB8AC3E}">
+        <p14:creationId xmlns:p14="http://schemas.microsoft.com/office/powerpoint/2010/main" val="3708953556"/>
+      </p:ext>
+    </p:extLst>
+  </p:cSld>
+  <p:clrMapOvr>
+    <a:masterClrMapping/>
+  </p:clrMapOvr>
+</p:notes>
+</file>
+
+<file path=ppt/notesSlides/notesSlide12.xml><?xml version="1.0" encoding="utf-8"?>
+<p:notes xmlns:a="http://schemas.openxmlformats.org/drawingml/2006/main" xmlns:r="http://schemas.openxmlformats.org/officeDocument/2006/relationships" xmlns:p="http://schemas.openxmlformats.org/presentationml/2006/main">
+  <p:cSld>
+    <p:spTree>
+      <p:nvGrpSpPr>
+        <p:cNvPr id="1" name=""/>
+        <p:cNvGrpSpPr/>
+        <p:nvPr/>
+      </p:nvGrpSpPr>
+      <p:grpSpPr>
+        <a:xfrm>
+          <a:off x="0" y="0"/>
+          <a:ext cx="0" cy="0"/>
+          <a:chOff x="0" y="0"/>
+          <a:chExt cx="0" cy="0"/>
+        </a:xfrm>
+      </p:grpSpPr>
+      <p:sp>
+        <p:nvSpPr>
+          <p:cNvPr id="2" name="Slide Image Placeholder 1"/>
+          <p:cNvSpPr>
+            <a:spLocks noGrp="1" noRot="1" noChangeAspect="1"/>
+          </p:cNvSpPr>
+          <p:nvPr>
+            <p:ph type="sldImg"/>
+          </p:nvPr>
+        </p:nvSpPr>
+        <p:spPr/>
+      </p:sp>
+      <p:sp>
+        <p:nvSpPr>
+          <p:cNvPr id="3" name="Notes Placeholder 2"/>
+          <p:cNvSpPr>
+            <a:spLocks noGrp="1"/>
+          </p:cNvSpPr>
+          <p:nvPr>
+            <p:ph type="body" idx="1"/>
+          </p:nvPr>
+        </p:nvSpPr>
+        <p:spPr/>
+        <p:txBody>
+          <a:bodyPr/>
+          <a:lstStyle/>
+          <a:p>
+            <a:endParaRPr lang="en-US" dirty="0"/>
+          </a:p>
+        </p:txBody>
+      </p:sp>
+      <p:sp>
+        <p:nvSpPr>
+          <p:cNvPr id="4" name="Slide Number Placeholder 3"/>
+          <p:cNvSpPr>
+            <a:spLocks noGrp="1"/>
+          </p:cNvSpPr>
+          <p:nvPr>
+            <p:ph type="sldNum" sz="quarter" idx="10"/>
+          </p:nvPr>
+        </p:nvSpPr>
+        <p:spPr/>
+        <p:txBody>
+          <a:bodyPr/>
+          <a:lstStyle/>
+          <a:p>
+            <a:fld id="{F7021451-1387-4CA6-816F-3879F97B5CBC}" type="slidenum">
+              <a:rPr lang="en-US"/>
+              <a:t>13</a:t>
+            </a:fld>
+            <a:endParaRPr lang="en-US"/>
+          </a:p>
+        </p:txBody>
+      </p:sp>
+    </p:spTree>
+    <p:extLst>
+      <p:ext uri="{BB962C8B-B14F-4D97-AF65-F5344CB8AC3E}">
         <p14:creationId xmlns:p14="http://schemas.microsoft.com/office/powerpoint/2010/main" val="540032434"/>
       </p:ext>
     </p:extLst>
@@ -1008,7 +1178,13 @@
   <p:cSld>
     <p:spTree>
       <p:nvGrpSpPr>
-        <p:cNvPr id="1" name=""/>
+        <p:cNvPr id="1" name="">
+          <a:extLst>
+            <a:ext uri="{FF2B5EF4-FFF2-40B4-BE49-F238E27FC236}">
+              <a16:creationId xmlns:a16="http://schemas.microsoft.com/office/drawing/2014/main" id="{BB64B6E9-2660-6C55-29E8-D123948418A6}"/>
+            </a:ext>
+          </a:extLst>
+        </p:cNvPr>
         <p:cNvGrpSpPr/>
         <p:nvPr/>
       </p:nvGrpSpPr>
@@ -1022,7 +1198,13 @@
       </p:grpSpPr>
       <p:sp>
         <p:nvSpPr>
-          <p:cNvPr id="2" name="Slide Image Placeholder 1"/>
+          <p:cNvPr id="2" name="Slide Image Placeholder 1">
+            <a:extLst>
+              <a:ext uri="{FF2B5EF4-FFF2-40B4-BE49-F238E27FC236}">
+                <a16:creationId xmlns:a16="http://schemas.microsoft.com/office/drawing/2014/main" id="{88D3585B-3A6A-76B2-1593-D9323C17D1AD}"/>
+              </a:ext>
+            </a:extLst>
+          </p:cNvPr>
           <p:cNvSpPr>
             <a:spLocks noGrp="1" noRot="1" noChangeAspect="1"/>
           </p:cNvSpPr>
@@ -1034,7 +1216,13 @@
       </p:sp>
       <p:sp>
         <p:nvSpPr>
-          <p:cNvPr id="3" name="Notes Placeholder 2"/>
+          <p:cNvPr id="3" name="Notes Placeholder 2">
+            <a:extLst>
+              <a:ext uri="{FF2B5EF4-FFF2-40B4-BE49-F238E27FC236}">
+                <a16:creationId xmlns:a16="http://schemas.microsoft.com/office/drawing/2014/main" id="{9E91F0D3-3490-D994-EE1B-B42D702A1465}"/>
+              </a:ext>
+            </a:extLst>
+          </p:cNvPr>
           <p:cNvSpPr>
             <a:spLocks noGrp="1"/>
           </p:cNvSpPr>
@@ -1053,7 +1241,13 @@
       </p:sp>
       <p:sp>
         <p:nvSpPr>
-          <p:cNvPr id="4" name="Slide Number Placeholder 3"/>
+          <p:cNvPr id="4" name="Slide Number Placeholder 3">
+            <a:extLst>
+              <a:ext uri="{FF2B5EF4-FFF2-40B4-BE49-F238E27FC236}">
+                <a16:creationId xmlns:a16="http://schemas.microsoft.com/office/drawing/2014/main" id="{EEE03936-6C24-3203-2DB5-A619C00EE825}"/>
+              </a:ext>
+            </a:extLst>
+          </p:cNvPr>
           <p:cNvSpPr>
             <a:spLocks noGrp="1"/>
           </p:cNvSpPr>
@@ -1077,7 +1271,7 @@
     </p:spTree>
     <p:extLst>
       <p:ext uri="{BB962C8B-B14F-4D97-AF65-F5344CB8AC3E}">
-        <p14:creationId xmlns:p14="http://schemas.microsoft.com/office/powerpoint/2010/main" val="962712694"/>
+        <p14:creationId xmlns:p14="http://schemas.microsoft.com/office/powerpoint/2010/main" val="2259250717"/>
       </p:ext>
     </p:extLst>
   </p:cSld>
@@ -1092,7 +1286,13 @@
   <p:cSld>
     <p:spTree>
       <p:nvGrpSpPr>
-        <p:cNvPr id="1" name=""/>
+        <p:cNvPr id="1" name="">
+          <a:extLst>
+            <a:ext uri="{FF2B5EF4-FFF2-40B4-BE49-F238E27FC236}">
+              <a16:creationId xmlns:a16="http://schemas.microsoft.com/office/drawing/2014/main" id="{D680E87C-1BF2-9990-5957-C9FFA92738D7}"/>
+            </a:ext>
+          </a:extLst>
+        </p:cNvPr>
         <p:cNvGrpSpPr/>
         <p:nvPr/>
       </p:nvGrpSpPr>
@@ -1106,7 +1306,13 @@
       </p:grpSpPr>
       <p:sp>
         <p:nvSpPr>
-          <p:cNvPr id="2" name="Slide Image Placeholder 1"/>
+          <p:cNvPr id="2" name="Slide Image Placeholder 1">
+            <a:extLst>
+              <a:ext uri="{FF2B5EF4-FFF2-40B4-BE49-F238E27FC236}">
+                <a16:creationId xmlns:a16="http://schemas.microsoft.com/office/drawing/2014/main" id="{2F2616CB-51FA-41FF-9EC1-15005C14B2DF}"/>
+              </a:ext>
+            </a:extLst>
+          </p:cNvPr>
           <p:cNvSpPr>
             <a:spLocks noGrp="1" noRot="1" noChangeAspect="1"/>
           </p:cNvSpPr>
@@ -1118,7 +1324,13 @@
       </p:sp>
       <p:sp>
         <p:nvSpPr>
-          <p:cNvPr id="3" name="Notes Placeholder 2"/>
+          <p:cNvPr id="3" name="Notes Placeholder 2">
+            <a:extLst>
+              <a:ext uri="{FF2B5EF4-FFF2-40B4-BE49-F238E27FC236}">
+                <a16:creationId xmlns:a16="http://schemas.microsoft.com/office/drawing/2014/main" id="{5DD6537D-BDD4-14AF-407A-6B6C93D777BB}"/>
+              </a:ext>
+            </a:extLst>
+          </p:cNvPr>
           <p:cNvSpPr>
             <a:spLocks noGrp="1"/>
           </p:cNvSpPr>
@@ -1137,7 +1349,13 @@
       </p:sp>
       <p:sp>
         <p:nvSpPr>
-          <p:cNvPr id="4" name="Slide Number Placeholder 3"/>
+          <p:cNvPr id="4" name="Slide Number Placeholder 3">
+            <a:extLst>
+              <a:ext uri="{FF2B5EF4-FFF2-40B4-BE49-F238E27FC236}">
+                <a16:creationId xmlns:a16="http://schemas.microsoft.com/office/drawing/2014/main" id="{7FEBD5C7-7608-8306-AEF5-02B8C20A6142}"/>
+              </a:ext>
+            </a:extLst>
+          </p:cNvPr>
           <p:cNvSpPr>
             <a:spLocks noGrp="1"/>
           </p:cNvSpPr>
@@ -1161,7 +1379,7 @@
     </p:spTree>
     <p:extLst>
       <p:ext uri="{BB962C8B-B14F-4D97-AF65-F5344CB8AC3E}">
-        <p14:creationId xmlns:p14="http://schemas.microsoft.com/office/powerpoint/2010/main" val="58213386"/>
+        <p14:creationId xmlns:p14="http://schemas.microsoft.com/office/powerpoint/2010/main" val="2461533932"/>
       </p:ext>
     </p:extLst>
   </p:cSld>
@@ -1245,7 +1463,7 @@
     </p:spTree>
     <p:extLst>
       <p:ext uri="{BB962C8B-B14F-4D97-AF65-F5344CB8AC3E}">
-        <p14:creationId xmlns:p14="http://schemas.microsoft.com/office/powerpoint/2010/main" val="2945130687"/>
+        <p14:creationId xmlns:p14="http://schemas.microsoft.com/office/powerpoint/2010/main" val="962712694"/>
       </p:ext>
     </p:extLst>
   </p:cSld>
@@ -1329,7 +1547,7 @@
     </p:spTree>
     <p:extLst>
       <p:ext uri="{BB962C8B-B14F-4D97-AF65-F5344CB8AC3E}">
-        <p14:creationId xmlns:p14="http://schemas.microsoft.com/office/powerpoint/2010/main" val="3708953556"/>
+        <p14:creationId xmlns:p14="http://schemas.microsoft.com/office/powerpoint/2010/main" val="58213386"/>
       </p:ext>
     </p:extLst>
   </p:cSld>
@@ -5134,6 +5352,555 @@
                 <a:ea typeface="Calibri" pitchFamily="34" charset="-122"/>
                 <a:cs typeface="Calibri" pitchFamily="34" charset="-120"/>
               </a:rPr>
+              <a:t>Impact &amp; Use cases</a:t>
+            </a:r>
+            <a:endParaRPr lang="en-US" sz="4267" dirty="0"/>
+          </a:p>
+        </p:txBody>
+      </p:sp>
+      <p:sp>
+        <p:nvSpPr>
+          <p:cNvPr id="18" name="Text 1">
+            <a:extLst>
+              <a:ext uri="{FF2B5EF4-FFF2-40B4-BE49-F238E27FC236}">
+                <a16:creationId xmlns:a16="http://schemas.microsoft.com/office/drawing/2014/main" id="{B0488D4E-8E6D-456D-9B00-8A96881B3AC1}"/>
+              </a:ext>
+            </a:extLst>
+          </p:cNvPr>
+          <p:cNvSpPr/>
+          <p:nvPr/>
+        </p:nvSpPr>
+        <p:spPr>
+          <a:xfrm>
+            <a:off x="5852160" y="1395928"/>
+            <a:ext cx="5120640" cy="5486400"/>
+          </a:xfrm>
+          <a:prstGeom prst="rect">
+            <a:avLst/>
+          </a:prstGeom>
+          <a:noFill/>
+          <a:ln/>
+        </p:spPr>
+        <p:txBody>
+          <a:bodyPr wrap="square" rtlCol="0" anchor="ctr"/>
+          <a:lstStyle/>
+          <a:p>
+            <a:pPr algn="ctr"/>
+            <a:endParaRPr lang="en-US" sz="26666" dirty="0"/>
+          </a:p>
+        </p:txBody>
+      </p:sp>
+      <p:sp>
+        <p:nvSpPr>
+          <p:cNvPr id="9" name="TextBox 8">
+            <a:extLst>
+              <a:ext uri="{FF2B5EF4-FFF2-40B4-BE49-F238E27FC236}">
+                <a16:creationId xmlns:a16="http://schemas.microsoft.com/office/drawing/2014/main" id="{04DB0243-BB37-4E48-8F2A-F31495290DC7}"/>
+              </a:ext>
+            </a:extLst>
+          </p:cNvPr>
+          <p:cNvSpPr txBox="1"/>
+          <p:nvPr/>
+        </p:nvSpPr>
+        <p:spPr>
+          <a:xfrm>
+            <a:off x="431181" y="1738471"/>
+            <a:ext cx="9897767" cy="5539978"/>
+          </a:xfrm>
+          <a:prstGeom prst="rect">
+            <a:avLst/>
+          </a:prstGeom>
+          <a:noFill/>
+        </p:spPr>
+        <p:txBody>
+          <a:bodyPr wrap="square" rtlCol="0">
+            <a:spAutoFit/>
+          </a:bodyPr>
+          <a:lstStyle/>
+          <a:p>
+            <a:endParaRPr lang="en-US" dirty="0"/>
+          </a:p>
+          <a:p>
+            <a:pPr marL="914400" lvl="1" indent="-457200">
+              <a:buFont typeface="Arial" panose="020B0604020202020204" pitchFamily="34" charset="0"/>
+              <a:buChar char="•"/>
+            </a:pPr>
+            <a:r>
+              <a:rPr lang="en-US" sz="2800" dirty="0"/>
+              <a:t>Remote collaboration between agents on different machines</a:t>
+            </a:r>
+          </a:p>
+          <a:p>
+            <a:pPr marL="914400" lvl="1" indent="-457200">
+              <a:buFont typeface="Arial" panose="020B0604020202020204" pitchFamily="34" charset="0"/>
+              <a:buChar char="•"/>
+            </a:pPr>
+            <a:endParaRPr lang="en-US" sz="2800" dirty="0"/>
+          </a:p>
+          <a:p>
+            <a:pPr marL="914400" lvl="1" indent="-457200">
+              <a:buFont typeface="Arial" panose="020B0604020202020204" pitchFamily="34" charset="0"/>
+              <a:buChar char="•"/>
+            </a:pPr>
+            <a:r>
+              <a:rPr lang="en-US" sz="2800" dirty="0"/>
+              <a:t>Shared task execution across devices</a:t>
+            </a:r>
+          </a:p>
+          <a:p>
+            <a:pPr marL="914400" lvl="1" indent="-457200">
+              <a:buFont typeface="Arial" panose="020B0604020202020204" pitchFamily="34" charset="0"/>
+              <a:buChar char="•"/>
+            </a:pPr>
+            <a:endParaRPr lang="en-US" sz="2800" dirty="0"/>
+          </a:p>
+          <a:p>
+            <a:pPr marL="914400" lvl="1" indent="-457200">
+              <a:buFont typeface="Arial" panose="020B0604020202020204" pitchFamily="34" charset="0"/>
+              <a:buChar char="•"/>
+            </a:pPr>
+            <a:r>
+              <a:rPr lang="en-US" sz="2800" dirty="0"/>
+              <a:t>Live propagation of state and events</a:t>
+            </a:r>
+          </a:p>
+          <a:p>
+            <a:pPr marL="914400" lvl="1" indent="-457200">
+              <a:buFont typeface="Arial" panose="020B0604020202020204" pitchFamily="34" charset="0"/>
+              <a:buChar char="•"/>
+            </a:pPr>
+            <a:endParaRPr lang="en-US" sz="2800" dirty="0"/>
+          </a:p>
+          <a:p>
+            <a:pPr marL="914400" lvl="1" indent="-457200">
+              <a:buFont typeface="Arial" panose="020B0604020202020204" pitchFamily="34" charset="0"/>
+              <a:buChar char="•"/>
+            </a:pPr>
+            <a:r>
+              <a:rPr lang="en-US" sz="2800" dirty="0"/>
+              <a:t>Distributed workflows for labs, teams, and offline networks</a:t>
+            </a:r>
+          </a:p>
+          <a:p>
+            <a:pPr marL="914400" lvl="1" indent="-457200">
+              <a:buFont typeface="Arial" panose="020B0604020202020204" pitchFamily="34" charset="0"/>
+              <a:buChar char="•"/>
+            </a:pPr>
+            <a:endParaRPr lang="en-US" sz="2800" dirty="0"/>
+          </a:p>
+          <a:p>
+            <a:pPr marL="914400" lvl="1" indent="-457200">
+              <a:buFont typeface="Arial" panose="020B0604020202020204" pitchFamily="34" charset="0"/>
+              <a:buChar char="•"/>
+            </a:pPr>
+            <a:r>
+              <a:rPr lang="en-US" sz="2800" dirty="0"/>
+              <a:t>File tracking is only one proof-of-power example, not the limit of the system</a:t>
+            </a:r>
+          </a:p>
+          <a:p>
+            <a:br>
+              <a:rPr lang="en-US" sz="2800" dirty="0"/>
+            </a:br>
+            <a:endParaRPr lang="en-US" sz="2800" dirty="0"/>
+          </a:p>
+        </p:txBody>
+      </p:sp>
+    </p:spTree>
+    <p:extLst>
+      <p:ext uri="{BB962C8B-B14F-4D97-AF65-F5344CB8AC3E}">
+        <p14:creationId xmlns:p14="http://schemas.microsoft.com/office/powerpoint/2010/main" val="2277358014"/>
+      </p:ext>
+    </p:extLst>
+  </p:cSld>
+  <p:clrMapOvr>
+    <a:masterClrMapping/>
+  </p:clrMapOvr>
+</p:sld>
+</file>
+
+<file path=ppt/slides/slide11.xml><?xml version="1.0" encoding="utf-8"?>
+<p:sld xmlns:a="http://schemas.openxmlformats.org/drawingml/2006/main" xmlns:r="http://schemas.openxmlformats.org/officeDocument/2006/relationships" xmlns:p="http://schemas.openxmlformats.org/presentationml/2006/main">
+  <p:cSld>
+    <p:spTree>
+      <p:nvGrpSpPr>
+        <p:cNvPr id="1" name=""/>
+        <p:cNvGrpSpPr/>
+        <p:nvPr/>
+      </p:nvGrpSpPr>
+      <p:grpSpPr>
+        <a:xfrm>
+          <a:off x="0" y="0"/>
+          <a:ext cx="0" cy="0"/>
+          <a:chOff x="0" y="0"/>
+          <a:chExt cx="0" cy="0"/>
+        </a:xfrm>
+      </p:grpSpPr>
+      <p:sp>
+        <p:nvSpPr>
+          <p:cNvPr id="2" name="Shape 0"/>
+          <p:cNvSpPr/>
+          <p:nvPr/>
+        </p:nvSpPr>
+        <p:spPr>
+          <a:xfrm>
+            <a:off x="0" y="0"/>
+            <a:ext cx="12192000" cy="85344"/>
+          </a:xfrm>
+          <a:prstGeom prst="rect">
+            <a:avLst/>
+          </a:prstGeom>
+          <a:solidFill>
+            <a:srgbClr val="00B4D8"/>
+          </a:solidFill>
+          <a:ln w="12700">
+            <a:solidFill>
+              <a:srgbClr val="00B4D8"/>
+            </a:solidFill>
+            <a:prstDash val="solid"/>
+          </a:ln>
+        </p:spPr>
+      </p:sp>
+      <p:sp>
+        <p:nvSpPr>
+          <p:cNvPr id="3" name="Shape 1"/>
+          <p:cNvSpPr/>
+          <p:nvPr/>
+        </p:nvSpPr>
+        <p:spPr>
+          <a:xfrm>
+            <a:off x="609600" y="219456"/>
+            <a:ext cx="1950720" cy="341376"/>
+          </a:xfrm>
+          <a:prstGeom prst="rect">
+            <a:avLst/>
+          </a:prstGeom>
+          <a:solidFill>
+            <a:srgbClr val="0077A8"/>
+          </a:solidFill>
+          <a:ln w="12700">
+            <a:solidFill>
+              <a:srgbClr val="0077A8"/>
+            </a:solidFill>
+            <a:prstDash val="solid"/>
+          </a:ln>
+        </p:spPr>
+      </p:sp>
+      <p:sp>
+        <p:nvSpPr>
+          <p:cNvPr id="4" name="Text 2"/>
+          <p:cNvSpPr/>
+          <p:nvPr/>
+        </p:nvSpPr>
+        <p:spPr>
+          <a:xfrm>
+            <a:off x="609600" y="219456"/>
+            <a:ext cx="1950720" cy="341376"/>
+          </a:xfrm>
+          <a:prstGeom prst="rect">
+            <a:avLst/>
+          </a:prstGeom>
+          <a:noFill/>
+          <a:ln/>
+        </p:spPr>
+        <p:txBody>
+          <a:bodyPr wrap="square" lIns="0" tIns="0" rIns="0" bIns="0" rtlCol="0" anchor="ctr"/>
+          <a:lstStyle/>
+          <a:p>
+            <a:pPr algn="ctr"/>
+            <a:r>
+              <a:rPr lang="en-US" sz="1000" b="1" dirty="0">
+                <a:solidFill>
+                  <a:schemeClr val="bg1"/>
+                </a:solidFill>
+              </a:rPr>
+              <a:t>Idea</a:t>
+            </a:r>
+            <a:endParaRPr lang="en-US" sz="1000" dirty="0">
+              <a:solidFill>
+                <a:schemeClr val="bg1"/>
+              </a:solidFill>
+            </a:endParaRPr>
+          </a:p>
+        </p:txBody>
+      </p:sp>
+      <p:sp>
+        <p:nvSpPr>
+          <p:cNvPr id="5" name="Text 3"/>
+          <p:cNvSpPr/>
+          <p:nvPr/>
+        </p:nvSpPr>
+        <p:spPr>
+          <a:xfrm>
+            <a:off x="609600" y="670560"/>
+            <a:ext cx="10972800" cy="853440"/>
+          </a:xfrm>
+          <a:prstGeom prst="rect">
+            <a:avLst/>
+          </a:prstGeom>
+          <a:noFill/>
+          <a:ln/>
+        </p:spPr>
+        <p:txBody>
+          <a:bodyPr wrap="square" lIns="0" tIns="0" rIns="0" bIns="0" rtlCol="0" anchor="ctr"/>
+          <a:lstStyle/>
+          <a:p>
+            <a:r>
+              <a:rPr lang="en-US" sz="4267" b="1" dirty="0">
+                <a:latin typeface="Calibri" pitchFamily="34" charset="0"/>
+                <a:ea typeface="Calibri" pitchFamily="34" charset="-122"/>
+                <a:cs typeface="Calibri" pitchFamily="34" charset="-120"/>
+              </a:rPr>
+              <a:t>Differentiation</a:t>
+            </a:r>
+            <a:endParaRPr lang="en-US" sz="4267" dirty="0"/>
+          </a:p>
+        </p:txBody>
+      </p:sp>
+      <p:sp>
+        <p:nvSpPr>
+          <p:cNvPr id="18" name="Text 1">
+            <a:extLst>
+              <a:ext uri="{FF2B5EF4-FFF2-40B4-BE49-F238E27FC236}">
+                <a16:creationId xmlns:a16="http://schemas.microsoft.com/office/drawing/2014/main" id="{B0488D4E-8E6D-456D-9B00-8A96881B3AC1}"/>
+              </a:ext>
+            </a:extLst>
+          </p:cNvPr>
+          <p:cNvSpPr/>
+          <p:nvPr/>
+        </p:nvSpPr>
+        <p:spPr>
+          <a:xfrm>
+            <a:off x="5852160" y="1395928"/>
+            <a:ext cx="5120640" cy="5486400"/>
+          </a:xfrm>
+          <a:prstGeom prst="rect">
+            <a:avLst/>
+          </a:prstGeom>
+          <a:noFill/>
+          <a:ln/>
+        </p:spPr>
+        <p:txBody>
+          <a:bodyPr wrap="square" rtlCol="0" anchor="ctr"/>
+          <a:lstStyle/>
+          <a:p>
+            <a:pPr algn="ctr"/>
+            <a:endParaRPr lang="en-US" sz="26666" dirty="0"/>
+          </a:p>
+        </p:txBody>
+      </p:sp>
+      <p:sp>
+        <p:nvSpPr>
+          <p:cNvPr id="9" name="TextBox 8">
+            <a:extLst>
+              <a:ext uri="{FF2B5EF4-FFF2-40B4-BE49-F238E27FC236}">
+                <a16:creationId xmlns:a16="http://schemas.microsoft.com/office/drawing/2014/main" id="{04DB0243-BB37-4E48-8F2A-F31495290DC7}"/>
+              </a:ext>
+            </a:extLst>
+          </p:cNvPr>
+          <p:cNvSpPr txBox="1"/>
+          <p:nvPr/>
+        </p:nvSpPr>
+        <p:spPr>
+          <a:xfrm>
+            <a:off x="740496" y="1682945"/>
+            <a:ext cx="10841904" cy="3816429"/>
+          </a:xfrm>
+          <a:prstGeom prst="rect">
+            <a:avLst/>
+          </a:prstGeom>
+          <a:noFill/>
+        </p:spPr>
+        <p:txBody>
+          <a:bodyPr wrap="square" rtlCol="0">
+            <a:spAutoFit/>
+          </a:bodyPr>
+          <a:lstStyle/>
+          <a:p>
+            <a:pPr marL="342900" indent="-342900">
+              <a:buFont typeface="+mj-lt"/>
+              <a:buAutoNum type="arabicPeriod"/>
+            </a:pPr>
+            <a:r>
+              <a:rPr lang="en-US" sz="2800" dirty="0"/>
+              <a:t>Direct peer-to-peer agent linking on local networks: </a:t>
+            </a:r>
+            <a:r>
+              <a:rPr lang="en-US" sz="2800" dirty="0" err="1"/>
+              <a:t>OpenClaw</a:t>
+            </a:r>
+            <a:r>
+              <a:rPr lang="en-US" sz="2800" dirty="0"/>
+              <a:t> nodes can discover, trust, and communicate with each other without relying on a central server or cloud backend.</a:t>
+            </a:r>
+          </a:p>
+          <a:p>
+            <a:pPr marL="342900" indent="-342900">
+              <a:buFont typeface="+mj-lt"/>
+              <a:buAutoNum type="arabicPeriod"/>
+            </a:pPr>
+            <a:endParaRPr lang="en-US" sz="2800" dirty="0"/>
+          </a:p>
+          <a:p>
+            <a:pPr marL="342900" indent="-342900">
+              <a:buFont typeface="+mj-lt"/>
+              <a:buAutoNum type="arabicPeriod"/>
+            </a:pPr>
+            <a:r>
+              <a:rPr lang="en-US" sz="2800" dirty="0"/>
+              <a:t>Reusable connection layer for many use cases: the same mesh channel can power file sync, shared state, remote actions, and future multi-agent workflows, making the core system much more valuable than a single demo feature.</a:t>
+            </a:r>
+          </a:p>
+          <a:p>
+            <a:endParaRPr lang="en-IN" dirty="0"/>
+          </a:p>
+        </p:txBody>
+      </p:sp>
+    </p:spTree>
+    <p:extLst>
+      <p:ext uri="{BB962C8B-B14F-4D97-AF65-F5344CB8AC3E}">
+        <p14:creationId xmlns:p14="http://schemas.microsoft.com/office/powerpoint/2010/main" val="1746425801"/>
+      </p:ext>
+    </p:extLst>
+  </p:cSld>
+  <p:clrMapOvr>
+    <a:masterClrMapping/>
+  </p:clrMapOvr>
+</p:sld>
+</file>
+
+<file path=ppt/slides/slide12.xml><?xml version="1.0" encoding="utf-8"?>
+<p:sld xmlns:a="http://schemas.openxmlformats.org/drawingml/2006/main" xmlns:r="http://schemas.openxmlformats.org/officeDocument/2006/relationships" xmlns:p="http://schemas.openxmlformats.org/presentationml/2006/main">
+  <p:cSld>
+    <p:spTree>
+      <p:nvGrpSpPr>
+        <p:cNvPr id="1" name=""/>
+        <p:cNvGrpSpPr/>
+        <p:nvPr/>
+      </p:nvGrpSpPr>
+      <p:grpSpPr>
+        <a:xfrm>
+          <a:off x="0" y="0"/>
+          <a:ext cx="0" cy="0"/>
+          <a:chOff x="0" y="0"/>
+          <a:chExt cx="0" cy="0"/>
+        </a:xfrm>
+      </p:grpSpPr>
+      <p:sp>
+        <p:nvSpPr>
+          <p:cNvPr id="2" name="Shape 0"/>
+          <p:cNvSpPr/>
+          <p:nvPr/>
+        </p:nvSpPr>
+        <p:spPr>
+          <a:xfrm>
+            <a:off x="0" y="0"/>
+            <a:ext cx="12192000" cy="85344"/>
+          </a:xfrm>
+          <a:prstGeom prst="rect">
+            <a:avLst/>
+          </a:prstGeom>
+          <a:solidFill>
+            <a:srgbClr val="00B4D8"/>
+          </a:solidFill>
+          <a:ln w="12700">
+            <a:solidFill>
+              <a:srgbClr val="00B4D8"/>
+            </a:solidFill>
+            <a:prstDash val="solid"/>
+          </a:ln>
+        </p:spPr>
+      </p:sp>
+      <p:sp>
+        <p:nvSpPr>
+          <p:cNvPr id="3" name="Shape 1"/>
+          <p:cNvSpPr/>
+          <p:nvPr/>
+        </p:nvSpPr>
+        <p:spPr>
+          <a:xfrm>
+            <a:off x="609600" y="219456"/>
+            <a:ext cx="1950720" cy="341376"/>
+          </a:xfrm>
+          <a:prstGeom prst="rect">
+            <a:avLst/>
+          </a:prstGeom>
+          <a:solidFill>
+            <a:srgbClr val="0077A8"/>
+          </a:solidFill>
+          <a:ln w="12700">
+            <a:solidFill>
+              <a:srgbClr val="0077A8"/>
+            </a:solidFill>
+            <a:prstDash val="solid"/>
+          </a:ln>
+        </p:spPr>
+      </p:sp>
+      <p:sp>
+        <p:nvSpPr>
+          <p:cNvPr id="4" name="Text 2"/>
+          <p:cNvSpPr/>
+          <p:nvPr/>
+        </p:nvSpPr>
+        <p:spPr>
+          <a:xfrm>
+            <a:off x="609600" y="219456"/>
+            <a:ext cx="1950720" cy="341376"/>
+          </a:xfrm>
+          <a:prstGeom prst="rect">
+            <a:avLst/>
+          </a:prstGeom>
+          <a:noFill/>
+          <a:ln/>
+        </p:spPr>
+        <p:txBody>
+          <a:bodyPr wrap="square" lIns="0" tIns="0" rIns="0" bIns="0" rtlCol="0" anchor="ctr"/>
+          <a:lstStyle/>
+          <a:p>
+            <a:pPr algn="ctr"/>
+            <a:r>
+              <a:rPr lang="en-US" sz="1000" b="1" dirty="0">
+                <a:solidFill>
+                  <a:schemeClr val="bg1"/>
+                </a:solidFill>
+              </a:rPr>
+              <a:t>Idea</a:t>
+            </a:r>
+            <a:endParaRPr lang="en-US" sz="1000" dirty="0">
+              <a:solidFill>
+                <a:schemeClr val="bg1"/>
+              </a:solidFill>
+            </a:endParaRPr>
+          </a:p>
+        </p:txBody>
+      </p:sp>
+      <p:sp>
+        <p:nvSpPr>
+          <p:cNvPr id="5" name="Text 3"/>
+          <p:cNvSpPr/>
+          <p:nvPr/>
+        </p:nvSpPr>
+        <p:spPr>
+          <a:xfrm>
+            <a:off x="609600" y="670560"/>
+            <a:ext cx="10972800" cy="853440"/>
+          </a:xfrm>
+          <a:prstGeom prst="rect">
+            <a:avLst/>
+          </a:prstGeom>
+          <a:noFill/>
+          <a:ln/>
+        </p:spPr>
+        <p:txBody>
+          <a:bodyPr wrap="square" lIns="0" tIns="0" rIns="0" bIns="0" rtlCol="0" anchor="ctr"/>
+          <a:lstStyle/>
+          <a:p>
+            <a:r>
+              <a:rPr lang="en-US" sz="4267" b="1" dirty="0">
+                <a:latin typeface="Calibri" pitchFamily="34" charset="0"/>
+                <a:ea typeface="Calibri" pitchFamily="34" charset="-122"/>
+                <a:cs typeface="Calibri" pitchFamily="34" charset="-120"/>
+              </a:rPr>
               <a:t>Demo Link</a:t>
             </a:r>
             <a:endParaRPr lang="en-US" sz="4267" dirty="0"/>
@@ -5223,7 +5990,7 @@
 </p:sld>
 </file>
 
-<file path=ppt/slides/slide11.xml><?xml version="1.0" encoding="utf-8"?>
+<file path=ppt/slides/slide13.xml><?xml version="1.0" encoding="utf-8"?>
 <p:sld xmlns:a="http://schemas.openxmlformats.org/drawingml/2006/main" xmlns:r="http://schemas.openxmlformats.org/officeDocument/2006/relationships" xmlns:p="http://schemas.openxmlformats.org/presentationml/2006/main">
   <p:cSld>
     <p:spTree>
@@ -6672,89 +7439,42 @@
           </a:p>
         </p:txBody>
       </p:sp>
-      <p:sp>
-        <p:nvSpPr>
-          <p:cNvPr id="9" name="TextBox 8">
-            <a:extLst>
-              <a:ext uri="{FF2B5EF4-FFF2-40B4-BE49-F238E27FC236}">
-                <a16:creationId xmlns:a16="http://schemas.microsoft.com/office/drawing/2014/main" id="{04DB0243-BB37-4E48-8F2A-F31495290DC7}"/>
-              </a:ext>
-            </a:extLst>
-          </p:cNvPr>
-          <p:cNvSpPr txBox="1"/>
+      <p:pic>
+        <p:nvPicPr>
+          <p:cNvPr id="7" name="Picture 6">
+            <a:extLst>
+              <a:ext uri="{FF2B5EF4-FFF2-40B4-BE49-F238E27FC236}">
+                <a16:creationId xmlns:a16="http://schemas.microsoft.com/office/drawing/2014/main" id="{E844C144-2237-FF21-C515-04DDEC385A1F}"/>
+              </a:ext>
+            </a:extLst>
+          </p:cNvPr>
+          <p:cNvPicPr>
+            <a:picLocks noChangeAspect="1"/>
+          </p:cNvPicPr>
           <p:nvPr/>
-        </p:nvSpPr>
-        <p:spPr>
-          <a:xfrm>
-            <a:off x="740496" y="1682945"/>
-            <a:ext cx="5570547" cy="923330"/>
+        </p:nvPicPr>
+        <p:blipFill>
+          <a:blip r:embed="rId3">
+            <a:extLst>
+              <a:ext uri="{28A0092B-C50C-407E-A947-70E740481C1C}">
+                <a14:useLocalDpi xmlns:a14="http://schemas.microsoft.com/office/drawing/2010/main" val="0"/>
+              </a:ext>
+            </a:extLst>
+          </a:blip>
+          <a:stretch>
+            <a:fillRect/>
+          </a:stretch>
+        </p:blipFill>
+        <p:spPr>
+          <a:xfrm>
+            <a:off x="2499360" y="1874464"/>
+            <a:ext cx="6705600" cy="4529328"/>
           </a:xfrm>
           <a:prstGeom prst="rect">
             <a:avLst/>
           </a:prstGeom>
-          <a:noFill/>
-        </p:spPr>
-        <p:txBody>
-          <a:bodyPr wrap="square" rtlCol="0">
-            <a:spAutoFit/>
-          </a:bodyPr>
-          <a:lstStyle/>
-          <a:p>
-            <a:r>
-              <a:rPr lang="en-IN" dirty="0"/>
-              <a:t>Screen/Flow</a:t>
-            </a:r>
-            <a:br>
-              <a:rPr lang="en-IN" dirty="0"/>
-            </a:br>
-            <a:r>
-              <a:rPr lang="en-IN" dirty="0"/>
-              <a:t>How User Interacts</a:t>
-            </a:r>
-          </a:p>
-          <a:p>
-            <a:r>
-              <a:rPr lang="en-IN" dirty="0"/>
-              <a:t>Key Moments</a:t>
-            </a:r>
-          </a:p>
-        </p:txBody>
-      </p:sp>
-      <p:sp>
-        <p:nvSpPr>
-          <p:cNvPr id="10" name="TextBox 9">
-            <a:extLst>
-              <a:ext uri="{FF2B5EF4-FFF2-40B4-BE49-F238E27FC236}">
-                <a16:creationId xmlns:a16="http://schemas.microsoft.com/office/drawing/2014/main" id="{005C1E9D-1F98-4CDB-8C10-EACE322B205B}"/>
-              </a:ext>
-            </a:extLst>
-          </p:cNvPr>
-          <p:cNvSpPr txBox="1"/>
-          <p:nvPr/>
-        </p:nvSpPr>
-        <p:spPr>
-          <a:xfrm>
-            <a:off x="6670071" y="4145654"/>
-            <a:ext cx="2760030" cy="646331"/>
-          </a:xfrm>
-          <a:prstGeom prst="rect">
-            <a:avLst/>
-          </a:prstGeom>
-          <a:noFill/>
-        </p:spPr>
-        <p:txBody>
-          <a:bodyPr wrap="square" rtlCol="0">
-            <a:spAutoFit/>
-          </a:bodyPr>
-          <a:lstStyle/>
-          <a:p>
-            <a:r>
-              <a:rPr lang="en-IN" dirty="0"/>
-              <a:t>This is the most important Slide</a:t>
-            </a:r>
-          </a:p>
-        </p:txBody>
-      </p:sp>
+        </p:spPr>
+      </p:pic>
     </p:spTree>
     <p:extLst>
       <p:ext uri="{BB962C8B-B14F-4D97-AF65-F5344CB8AC3E}">
@@ -6773,7 +7493,13 @@
   <p:cSld>
     <p:spTree>
       <p:nvGrpSpPr>
-        <p:cNvPr id="1" name=""/>
+        <p:cNvPr id="1" name="">
+          <a:extLst>
+            <a:ext uri="{FF2B5EF4-FFF2-40B4-BE49-F238E27FC236}">
+              <a16:creationId xmlns:a16="http://schemas.microsoft.com/office/drawing/2014/main" id="{16F8C5B8-DD50-2E84-6CF2-5F104FB4855A}"/>
+            </a:ext>
+          </a:extLst>
+        </p:cNvPr>
         <p:cNvGrpSpPr/>
         <p:nvPr/>
       </p:nvGrpSpPr>
@@ -6787,7 +7513,13 @@
       </p:grpSpPr>
       <p:sp>
         <p:nvSpPr>
-          <p:cNvPr id="2" name="Shape 0"/>
+          <p:cNvPr id="2" name="Shape 0">
+            <a:extLst>
+              <a:ext uri="{FF2B5EF4-FFF2-40B4-BE49-F238E27FC236}">
+                <a16:creationId xmlns:a16="http://schemas.microsoft.com/office/drawing/2014/main" id="{6C58AEF3-2A97-568F-4CB9-5D7A3D167D88}"/>
+              </a:ext>
+            </a:extLst>
+          </p:cNvPr>
           <p:cNvSpPr/>
           <p:nvPr/>
         </p:nvSpPr>
@@ -6812,32 +7544,13 @@
       </p:sp>
       <p:sp>
         <p:nvSpPr>
-          <p:cNvPr id="3" name="Shape 1"/>
-          <p:cNvSpPr/>
-          <p:nvPr/>
-        </p:nvSpPr>
-        <p:spPr>
-          <a:xfrm>
-            <a:off x="609600" y="219456"/>
-            <a:ext cx="1950720" cy="341376"/>
-          </a:xfrm>
-          <a:prstGeom prst="rect">
-            <a:avLst/>
-          </a:prstGeom>
-          <a:solidFill>
-            <a:srgbClr val="0077A8"/>
-          </a:solidFill>
-          <a:ln w="12700">
-            <a:solidFill>
-              <a:srgbClr val="0077A8"/>
-            </a:solidFill>
-            <a:prstDash val="solid"/>
-          </a:ln>
-        </p:spPr>
-      </p:sp>
-      <p:sp>
-        <p:nvSpPr>
-          <p:cNvPr id="4" name="Text 2"/>
+          <p:cNvPr id="4" name="Text 2">
+            <a:extLst>
+              <a:ext uri="{FF2B5EF4-FFF2-40B4-BE49-F238E27FC236}">
+                <a16:creationId xmlns:a16="http://schemas.microsoft.com/office/drawing/2014/main" id="{3BDF451C-B287-A32F-6F9E-5A9E7FE45340}"/>
+              </a:ext>
+            </a:extLst>
+          </p:cNvPr>
           <p:cNvSpPr/>
           <p:nvPr/>
         </p:nvSpPr>
@@ -6875,14 +7588,20 @@
       </p:sp>
       <p:sp>
         <p:nvSpPr>
-          <p:cNvPr id="5" name="Text 3"/>
+          <p:cNvPr id="18" name="Text 1">
+            <a:extLst>
+              <a:ext uri="{FF2B5EF4-FFF2-40B4-BE49-F238E27FC236}">
+                <a16:creationId xmlns:a16="http://schemas.microsoft.com/office/drawing/2014/main" id="{60852FDF-2FAC-FC69-A799-B5FC641284B4}"/>
+              </a:ext>
+            </a:extLst>
+          </p:cNvPr>
           <p:cNvSpPr/>
           <p:nvPr/>
         </p:nvSpPr>
         <p:spPr>
           <a:xfrm>
-            <a:off x="609600" y="670560"/>
-            <a:ext cx="10972800" cy="853440"/>
+            <a:off x="5852160" y="1395928"/>
+            <a:ext cx="5120640" cy="5486400"/>
           </a:xfrm>
           <a:prstGeom prst="rect">
             <a:avLst/>
@@ -6891,186 +7610,54 @@
           <a:ln/>
         </p:spPr>
         <p:txBody>
-          <a:bodyPr wrap="square" lIns="0" tIns="0" rIns="0" bIns="0" rtlCol="0" anchor="ctr"/>
-          <a:lstStyle/>
-          <a:p>
-            <a:r>
-              <a:rPr lang="en-US" sz="4267" b="1" dirty="0">
-                <a:latin typeface="Calibri" pitchFamily="34" charset="0"/>
-                <a:ea typeface="Calibri" pitchFamily="34" charset="-122"/>
-                <a:cs typeface="Calibri" pitchFamily="34" charset="-120"/>
-              </a:rPr>
-              <a:t>Tech &amp; Architecture</a:t>
-            </a:r>
-            <a:endParaRPr lang="en-US" sz="4267" dirty="0"/>
-          </a:p>
-        </p:txBody>
-      </p:sp>
-      <p:sp>
-        <p:nvSpPr>
-          <p:cNvPr id="18" name="Text 1">
-            <a:extLst>
-              <a:ext uri="{FF2B5EF4-FFF2-40B4-BE49-F238E27FC236}">
-                <a16:creationId xmlns:a16="http://schemas.microsoft.com/office/drawing/2014/main" id="{B0488D4E-8E6D-456D-9B00-8A96881B3AC1}"/>
-              </a:ext>
-            </a:extLst>
-          </p:cNvPr>
-          <p:cNvSpPr/>
+          <a:bodyPr wrap="square" rtlCol="0" anchor="ctr"/>
+          <a:lstStyle/>
+          <a:p>
+            <a:pPr algn="ctr"/>
+            <a:endParaRPr lang="en-US" sz="26666" dirty="0"/>
+          </a:p>
+        </p:txBody>
+      </p:sp>
+      <p:pic>
+        <p:nvPicPr>
+          <p:cNvPr id="8" name="Picture 7">
+            <a:extLst>
+              <a:ext uri="{FF2B5EF4-FFF2-40B4-BE49-F238E27FC236}">
+                <a16:creationId xmlns:a16="http://schemas.microsoft.com/office/drawing/2014/main" id="{7258C431-5349-6284-E108-5F68F2FF8272}"/>
+              </a:ext>
+            </a:extLst>
+          </p:cNvPr>
+          <p:cNvPicPr>
+            <a:picLocks noChangeAspect="1"/>
+          </p:cNvPicPr>
           <p:nvPr/>
-        </p:nvSpPr>
-        <p:spPr>
-          <a:xfrm>
-            <a:off x="5852160" y="1395928"/>
-            <a:ext cx="5120640" cy="5486400"/>
+        </p:nvPicPr>
+        <p:blipFill>
+          <a:blip r:embed="rId3">
+            <a:extLst>
+              <a:ext uri="{28A0092B-C50C-407E-A947-70E740481C1C}">
+                <a14:useLocalDpi xmlns:a14="http://schemas.microsoft.com/office/drawing/2010/main" val="0"/>
+              </a:ext>
+            </a:extLst>
+          </a:blip>
+          <a:stretch>
+            <a:fillRect/>
+          </a:stretch>
+        </p:blipFill>
+        <p:spPr>
+          <a:xfrm>
+            <a:off x="379141" y="219456"/>
+            <a:ext cx="11653025" cy="6549334"/>
           </a:xfrm>
           <a:prstGeom prst="rect">
             <a:avLst/>
           </a:prstGeom>
-          <a:noFill/>
-          <a:ln/>
-        </p:spPr>
-        <p:txBody>
-          <a:bodyPr wrap="square" rtlCol="0" anchor="ctr"/>
-          <a:lstStyle/>
-          <a:p>
-            <a:pPr algn="ctr"/>
-            <a:endParaRPr lang="en-US" sz="26666" dirty="0"/>
-          </a:p>
-        </p:txBody>
-      </p:sp>
-      <p:sp>
-        <p:nvSpPr>
-          <p:cNvPr id="9" name="TextBox 8">
-            <a:extLst>
-              <a:ext uri="{FF2B5EF4-FFF2-40B4-BE49-F238E27FC236}">
-                <a16:creationId xmlns:a16="http://schemas.microsoft.com/office/drawing/2014/main" id="{04DB0243-BB37-4E48-8F2A-F31495290DC7}"/>
-              </a:ext>
-            </a:extLst>
-          </p:cNvPr>
-          <p:cNvSpPr txBox="1"/>
-          <p:nvPr/>
-        </p:nvSpPr>
-        <p:spPr>
-          <a:xfrm>
-            <a:off x="740496" y="1682945"/>
-            <a:ext cx="9786255" cy="3970318"/>
-          </a:xfrm>
-          <a:prstGeom prst="rect">
-            <a:avLst/>
-          </a:prstGeom>
-          <a:noFill/>
-        </p:spPr>
-        <p:txBody>
-          <a:bodyPr wrap="square" rtlCol="0">
-            <a:spAutoFit/>
-          </a:bodyPr>
-          <a:lstStyle/>
-          <a:p>
-            <a:pPr marL="285750" indent="-285750">
-              <a:buFont typeface="Arial" panose="020B0604020202020204" pitchFamily="34" charset="0"/>
-              <a:buChar char="•"/>
-            </a:pPr>
-            <a:endParaRPr lang="en-US" sz="2400" dirty="0"/>
-          </a:p>
-          <a:p>
-            <a:pPr marL="742950" lvl="1" indent="-285750">
-              <a:buFont typeface="Arial" panose="020B0604020202020204" pitchFamily="34" charset="0"/>
-              <a:buChar char="•"/>
-            </a:pPr>
-            <a:r>
-              <a:rPr lang="en-US" sz="2400" dirty="0" err="1"/>
-              <a:t>OpenClaw</a:t>
-            </a:r>
-            <a:r>
-              <a:rPr lang="en-US" sz="2400" dirty="0"/>
-              <a:t> Gateway</a:t>
-            </a:r>
-          </a:p>
-          <a:p>
-            <a:pPr marL="742950" lvl="1" indent="-285750">
-              <a:buFont typeface="Arial" panose="020B0604020202020204" pitchFamily="34" charset="0"/>
-              <a:buChar char="•"/>
-            </a:pPr>
-            <a:r>
-              <a:rPr lang="en-US" sz="2400" dirty="0"/>
-              <a:t>Mesh Extension</a:t>
-            </a:r>
-          </a:p>
-          <a:p>
-            <a:pPr marL="742950" lvl="1" indent="-285750">
-              <a:buFont typeface="Arial" panose="020B0604020202020204" pitchFamily="34" charset="0"/>
-              <a:buChar char="•"/>
-            </a:pPr>
-            <a:r>
-              <a:rPr lang="en-US" sz="2400" dirty="0"/>
-              <a:t>Discovery: subnet scan + </a:t>
-            </a:r>
-            <a:r>
-              <a:rPr lang="en-US" sz="2400" dirty="0" err="1"/>
-              <a:t>mDNS</a:t>
-            </a:r>
-            <a:endParaRPr lang="en-US" sz="2400" dirty="0"/>
-          </a:p>
-          <a:p>
-            <a:pPr marL="742950" lvl="1" indent="-285750">
-              <a:buFont typeface="Arial" panose="020B0604020202020204" pitchFamily="34" charset="0"/>
-              <a:buChar char="•"/>
-            </a:pPr>
-            <a:r>
-              <a:rPr lang="en-US" sz="2400" dirty="0"/>
-              <a:t>Transport: WebSocket approval, manifest exchange, push/pull</a:t>
-            </a:r>
-          </a:p>
-          <a:p>
-            <a:pPr marL="742950" lvl="1" indent="-285750">
-              <a:buFont typeface="Arial" panose="020B0604020202020204" pitchFamily="34" charset="0"/>
-              <a:buChar char="•"/>
-            </a:pPr>
-            <a:r>
-              <a:rPr lang="en-US" sz="2400" dirty="0"/>
-              <a:t>Sync state: hash tracking, pending changes, conflict detection</a:t>
-            </a:r>
-          </a:p>
-          <a:p>
-            <a:pPr marL="742950" lvl="1" indent="-285750">
-              <a:buFont typeface="Arial" panose="020B0604020202020204" pitchFamily="34" charset="0"/>
-              <a:buChar char="•"/>
-            </a:pPr>
-            <a:r>
-              <a:rPr lang="en-US" sz="2400" dirty="0"/>
-              <a:t>File watcher: all files, deletions, binary support, feedback-loop suppression</a:t>
-            </a:r>
-          </a:p>
-          <a:p>
-            <a:pPr marL="742950" lvl="1" indent="-285750">
-              <a:buFont typeface="Arial" panose="020B0604020202020204" pitchFamily="34" charset="0"/>
-              <a:buChar char="•"/>
-            </a:pPr>
-            <a:r>
-              <a:rPr lang="en-US" sz="2400" dirty="0"/>
-              <a:t>Tech stack: TypeScript, Node.js 22+, </a:t>
-            </a:r>
-            <a:r>
-              <a:rPr lang="en-US" sz="2400" dirty="0" err="1"/>
-              <a:t>OpenClaw</a:t>
-            </a:r>
-            <a:r>
-              <a:rPr lang="en-US" sz="2400" dirty="0"/>
-              <a:t> plugin runtime</a:t>
-            </a:r>
-          </a:p>
-          <a:p>
-            <a:br>
-              <a:rPr lang="en-US" dirty="0"/>
-            </a:br>
-            <a:endParaRPr lang="en-IN" dirty="0"/>
-          </a:p>
-        </p:txBody>
-      </p:sp>
+        </p:spPr>
+      </p:pic>
     </p:spTree>
     <p:extLst>
       <p:ext uri="{BB962C8B-B14F-4D97-AF65-F5344CB8AC3E}">
-        <p14:creationId xmlns:p14="http://schemas.microsoft.com/office/powerpoint/2010/main" val="56678744"/>
+        <p14:creationId xmlns:p14="http://schemas.microsoft.com/office/powerpoint/2010/main" val="1242884584"/>
       </p:ext>
     </p:extLst>
   </p:cSld>
@@ -7085,7 +7672,13 @@
   <p:cSld>
     <p:spTree>
       <p:nvGrpSpPr>
-        <p:cNvPr id="1" name=""/>
+        <p:cNvPr id="1" name="">
+          <a:extLst>
+            <a:ext uri="{FF2B5EF4-FFF2-40B4-BE49-F238E27FC236}">
+              <a16:creationId xmlns:a16="http://schemas.microsoft.com/office/drawing/2014/main" id="{19121CE8-2195-805A-59F4-5E670B8DA17F}"/>
+            </a:ext>
+          </a:extLst>
+        </p:cNvPr>
         <p:cNvGrpSpPr/>
         <p:nvPr/>
       </p:nvGrpSpPr>
@@ -7099,7 +7692,13 @@
       </p:grpSpPr>
       <p:sp>
         <p:nvSpPr>
-          <p:cNvPr id="2" name="Shape 0"/>
+          <p:cNvPr id="2" name="Shape 0">
+            <a:extLst>
+              <a:ext uri="{FF2B5EF4-FFF2-40B4-BE49-F238E27FC236}">
+                <a16:creationId xmlns:a16="http://schemas.microsoft.com/office/drawing/2014/main" id="{31CF0CCA-687C-EA72-54A8-FC96E246DA6C}"/>
+              </a:ext>
+            </a:extLst>
+          </p:cNvPr>
           <p:cNvSpPr/>
           <p:nvPr/>
         </p:nvSpPr>
@@ -7124,32 +7723,13 @@
       </p:sp>
       <p:sp>
         <p:nvSpPr>
-          <p:cNvPr id="3" name="Shape 1"/>
-          <p:cNvSpPr/>
-          <p:nvPr/>
-        </p:nvSpPr>
-        <p:spPr>
-          <a:xfrm>
-            <a:off x="609600" y="219456"/>
-            <a:ext cx="1950720" cy="341376"/>
-          </a:xfrm>
-          <a:prstGeom prst="rect">
-            <a:avLst/>
-          </a:prstGeom>
-          <a:solidFill>
-            <a:srgbClr val="0077A8"/>
-          </a:solidFill>
-          <a:ln w="12700">
-            <a:solidFill>
-              <a:srgbClr val="0077A8"/>
-            </a:solidFill>
-            <a:prstDash val="solid"/>
-          </a:ln>
-        </p:spPr>
-      </p:sp>
-      <p:sp>
-        <p:nvSpPr>
-          <p:cNvPr id="4" name="Text 2"/>
+          <p:cNvPr id="4" name="Text 2">
+            <a:extLst>
+              <a:ext uri="{FF2B5EF4-FFF2-40B4-BE49-F238E27FC236}">
+                <a16:creationId xmlns:a16="http://schemas.microsoft.com/office/drawing/2014/main" id="{4E2ED09B-6F53-F002-05F7-755056922A5B}"/>
+              </a:ext>
+            </a:extLst>
+          </p:cNvPr>
           <p:cNvSpPr/>
           <p:nvPr/>
         </p:nvSpPr>
@@ -7187,14 +7767,20 @@
       </p:sp>
       <p:sp>
         <p:nvSpPr>
-          <p:cNvPr id="5" name="Text 3"/>
+          <p:cNvPr id="18" name="Text 1">
+            <a:extLst>
+              <a:ext uri="{FF2B5EF4-FFF2-40B4-BE49-F238E27FC236}">
+                <a16:creationId xmlns:a16="http://schemas.microsoft.com/office/drawing/2014/main" id="{41DF72B5-1C37-F3B2-7241-AA2673B4CE0E}"/>
+              </a:ext>
+            </a:extLst>
+          </p:cNvPr>
           <p:cNvSpPr/>
           <p:nvPr/>
         </p:nvSpPr>
         <p:spPr>
           <a:xfrm>
-            <a:off x="609600" y="670560"/>
-            <a:ext cx="10972800" cy="853440"/>
+            <a:off x="5852160" y="1395928"/>
+            <a:ext cx="5120640" cy="5486400"/>
           </a:xfrm>
           <a:prstGeom prst="rect">
             <a:avLst/>
@@ -7203,173 +7789,54 @@
           <a:ln/>
         </p:spPr>
         <p:txBody>
-          <a:bodyPr wrap="square" lIns="0" tIns="0" rIns="0" bIns="0" rtlCol="0" anchor="ctr"/>
-          <a:lstStyle/>
-          <a:p>
-            <a:r>
-              <a:rPr lang="en-US" sz="4267" b="1" dirty="0">
-                <a:latin typeface="Calibri" pitchFamily="34" charset="0"/>
-                <a:ea typeface="Calibri" pitchFamily="34" charset="-122"/>
-                <a:cs typeface="Calibri" pitchFamily="34" charset="-120"/>
-              </a:rPr>
-              <a:t>Impact &amp; Use cases</a:t>
-            </a:r>
-            <a:endParaRPr lang="en-US" sz="4267" dirty="0"/>
-          </a:p>
-        </p:txBody>
-      </p:sp>
-      <p:sp>
-        <p:nvSpPr>
-          <p:cNvPr id="18" name="Text 1">
-            <a:extLst>
-              <a:ext uri="{FF2B5EF4-FFF2-40B4-BE49-F238E27FC236}">
-                <a16:creationId xmlns:a16="http://schemas.microsoft.com/office/drawing/2014/main" id="{B0488D4E-8E6D-456D-9B00-8A96881B3AC1}"/>
-              </a:ext>
-            </a:extLst>
-          </p:cNvPr>
-          <p:cNvSpPr/>
+          <a:bodyPr wrap="square" rtlCol="0" anchor="ctr"/>
+          <a:lstStyle/>
+          <a:p>
+            <a:pPr algn="ctr"/>
+            <a:endParaRPr lang="en-US" sz="26666" dirty="0"/>
+          </a:p>
+        </p:txBody>
+      </p:sp>
+      <p:pic>
+        <p:nvPicPr>
+          <p:cNvPr id="8" name="Picture 7">
+            <a:extLst>
+              <a:ext uri="{FF2B5EF4-FFF2-40B4-BE49-F238E27FC236}">
+                <a16:creationId xmlns:a16="http://schemas.microsoft.com/office/drawing/2014/main" id="{2F5F072F-8C8D-7766-F5D5-5621CC578D84}"/>
+              </a:ext>
+            </a:extLst>
+          </p:cNvPr>
+          <p:cNvPicPr>
+            <a:picLocks noChangeAspect="1"/>
+          </p:cNvPicPr>
           <p:nvPr/>
-        </p:nvSpPr>
-        <p:spPr>
-          <a:xfrm>
-            <a:off x="5852160" y="1395928"/>
-            <a:ext cx="5120640" cy="5486400"/>
+        </p:nvPicPr>
+        <p:blipFill>
+          <a:blip r:embed="rId3">
+            <a:extLst>
+              <a:ext uri="{28A0092B-C50C-407E-A947-70E740481C1C}">
+                <a14:useLocalDpi xmlns:a14="http://schemas.microsoft.com/office/drawing/2010/main" val="0"/>
+              </a:ext>
+            </a:extLst>
+          </a:blip>
+          <a:stretch>
+            <a:fillRect/>
+          </a:stretch>
+        </p:blipFill>
+        <p:spPr>
+          <a:xfrm>
+            <a:off x="2209800" y="219456"/>
+            <a:ext cx="7772400" cy="6486631"/>
           </a:xfrm>
           <a:prstGeom prst="rect">
             <a:avLst/>
           </a:prstGeom>
-          <a:noFill/>
-          <a:ln/>
-        </p:spPr>
-        <p:txBody>
-          <a:bodyPr wrap="square" rtlCol="0" anchor="ctr"/>
-          <a:lstStyle/>
-          <a:p>
-            <a:pPr algn="ctr"/>
-            <a:endParaRPr lang="en-US" sz="26666" dirty="0"/>
-          </a:p>
-        </p:txBody>
-      </p:sp>
-      <p:sp>
-        <p:nvSpPr>
-          <p:cNvPr id="9" name="TextBox 8">
-            <a:extLst>
-              <a:ext uri="{FF2B5EF4-FFF2-40B4-BE49-F238E27FC236}">
-                <a16:creationId xmlns:a16="http://schemas.microsoft.com/office/drawing/2014/main" id="{04DB0243-BB37-4E48-8F2A-F31495290DC7}"/>
-              </a:ext>
-            </a:extLst>
-          </p:cNvPr>
-          <p:cNvSpPr txBox="1"/>
-          <p:nvPr/>
-        </p:nvSpPr>
-        <p:spPr>
-          <a:xfrm>
-            <a:off x="431181" y="1738471"/>
-            <a:ext cx="9897767" cy="5539978"/>
-          </a:xfrm>
-          <a:prstGeom prst="rect">
-            <a:avLst/>
-          </a:prstGeom>
-          <a:noFill/>
-        </p:spPr>
-        <p:txBody>
-          <a:bodyPr wrap="square" rtlCol="0">
-            <a:spAutoFit/>
-          </a:bodyPr>
-          <a:lstStyle/>
-          <a:p>
-            <a:endParaRPr lang="en-US" dirty="0"/>
-          </a:p>
-          <a:p>
-            <a:pPr marL="914400" lvl="1" indent="-457200">
-              <a:buFont typeface="Arial" panose="020B0604020202020204" pitchFamily="34" charset="0"/>
-              <a:buChar char="•"/>
-            </a:pPr>
-            <a:r>
-              <a:rPr lang="en-US" sz="2800" dirty="0"/>
-              <a:t>Remote collaboration between agents on different machines</a:t>
-            </a:r>
-          </a:p>
-          <a:p>
-            <a:pPr marL="914400" lvl="1" indent="-457200">
-              <a:buFont typeface="Arial" panose="020B0604020202020204" pitchFamily="34" charset="0"/>
-              <a:buChar char="•"/>
-            </a:pPr>
-            <a:endParaRPr lang="en-US" sz="2800" dirty="0"/>
-          </a:p>
-          <a:p>
-            <a:pPr marL="914400" lvl="1" indent="-457200">
-              <a:buFont typeface="Arial" panose="020B0604020202020204" pitchFamily="34" charset="0"/>
-              <a:buChar char="•"/>
-            </a:pPr>
-            <a:r>
-              <a:rPr lang="en-US" sz="2800" dirty="0"/>
-              <a:t>Shared task execution across devices</a:t>
-            </a:r>
-          </a:p>
-          <a:p>
-            <a:pPr marL="914400" lvl="1" indent="-457200">
-              <a:buFont typeface="Arial" panose="020B0604020202020204" pitchFamily="34" charset="0"/>
-              <a:buChar char="•"/>
-            </a:pPr>
-            <a:endParaRPr lang="en-US" sz="2800" dirty="0"/>
-          </a:p>
-          <a:p>
-            <a:pPr marL="914400" lvl="1" indent="-457200">
-              <a:buFont typeface="Arial" panose="020B0604020202020204" pitchFamily="34" charset="0"/>
-              <a:buChar char="•"/>
-            </a:pPr>
-            <a:r>
-              <a:rPr lang="en-US" sz="2800" dirty="0"/>
-              <a:t>Live propagation of state and events</a:t>
-            </a:r>
-          </a:p>
-          <a:p>
-            <a:pPr marL="914400" lvl="1" indent="-457200">
-              <a:buFont typeface="Arial" panose="020B0604020202020204" pitchFamily="34" charset="0"/>
-              <a:buChar char="•"/>
-            </a:pPr>
-            <a:endParaRPr lang="en-US" sz="2800" dirty="0"/>
-          </a:p>
-          <a:p>
-            <a:pPr marL="914400" lvl="1" indent="-457200">
-              <a:buFont typeface="Arial" panose="020B0604020202020204" pitchFamily="34" charset="0"/>
-              <a:buChar char="•"/>
-            </a:pPr>
-            <a:r>
-              <a:rPr lang="en-US" sz="2800" dirty="0"/>
-              <a:t>Distributed workflows for labs, teams, and offline networks</a:t>
-            </a:r>
-          </a:p>
-          <a:p>
-            <a:pPr marL="914400" lvl="1" indent="-457200">
-              <a:buFont typeface="Arial" panose="020B0604020202020204" pitchFamily="34" charset="0"/>
-              <a:buChar char="•"/>
-            </a:pPr>
-            <a:endParaRPr lang="en-US" sz="2800" dirty="0"/>
-          </a:p>
-          <a:p>
-            <a:pPr marL="914400" lvl="1" indent="-457200">
-              <a:buFont typeface="Arial" panose="020B0604020202020204" pitchFamily="34" charset="0"/>
-              <a:buChar char="•"/>
-            </a:pPr>
-            <a:r>
-              <a:rPr lang="en-US" sz="2800" dirty="0"/>
-              <a:t>File tracking is only one proof-of-power example, not the limit of the system</a:t>
-            </a:r>
-          </a:p>
-          <a:p>
-            <a:br>
-              <a:rPr lang="en-US" sz="2800" dirty="0"/>
-            </a:br>
-            <a:endParaRPr lang="en-US" sz="2800" dirty="0"/>
-          </a:p>
-        </p:txBody>
-      </p:sp>
+        </p:spPr>
+      </p:pic>
     </p:spTree>
     <p:extLst>
       <p:ext uri="{BB962C8B-B14F-4D97-AF65-F5344CB8AC3E}">
-        <p14:creationId xmlns:p14="http://schemas.microsoft.com/office/powerpoint/2010/main" val="2277358014"/>
+        <p14:creationId xmlns:p14="http://schemas.microsoft.com/office/powerpoint/2010/main" val="647410633"/>
       </p:ext>
     </p:extLst>
   </p:cSld>
@@ -7511,7 +7978,7 @@
                 <a:ea typeface="Calibri" pitchFamily="34" charset="-122"/>
                 <a:cs typeface="Calibri" pitchFamily="34" charset="-120"/>
               </a:rPr>
-              <a:t>Differentiation</a:t>
+              <a:t>Tech &amp; Architecture</a:t>
             </a:r>
             <a:endParaRPr lang="en-US" sz="4267" dirty="0"/>
           </a:p>
@@ -7564,7 +8031,7 @@
         <p:spPr>
           <a:xfrm>
             <a:off x="740496" y="1682945"/>
-            <a:ext cx="10841904" cy="3816429"/>
+            <a:ext cx="9786255" cy="3970318"/>
           </a:xfrm>
           <a:prstGeom prst="rect">
             <a:avLst/>
@@ -7577,41 +8044,103 @@
           </a:bodyPr>
           <a:lstStyle/>
           <a:p>
-            <a:pPr marL="342900" indent="-342900">
-              <a:buFont typeface="+mj-lt"/>
-              <a:buAutoNum type="arabicPeriod"/>
+            <a:pPr marL="285750" indent="-285750">
+              <a:buFont typeface="Arial" panose="020B0604020202020204" pitchFamily="34" charset="0"/>
+              <a:buChar char="•"/>
             </a:pPr>
-            <a:r>
-              <a:rPr lang="en-US" sz="2800" dirty="0"/>
-              <a:t>Direct peer-to-peer agent linking on local networks: </a:t>
-            </a:r>
-            <a:r>
-              <a:rPr lang="en-US" sz="2800" dirty="0" err="1"/>
+            <a:endParaRPr lang="en-US" sz="2400" dirty="0"/>
+          </a:p>
+          <a:p>
+            <a:pPr marL="742950" lvl="1" indent="-285750">
+              <a:buFont typeface="Arial" panose="020B0604020202020204" pitchFamily="34" charset="0"/>
+              <a:buChar char="•"/>
+            </a:pPr>
+            <a:r>
+              <a:rPr lang="en-US" sz="2400" dirty="0" err="1"/>
               <a:t>OpenClaw</a:t>
             </a:r>
             <a:r>
-              <a:rPr lang="en-US" sz="2800" dirty="0"/>
-              <a:t> nodes can discover, trust, and communicate with each other without relying on a central server or cloud backend.</a:t>
-            </a:r>
-          </a:p>
-          <a:p>
-            <a:pPr marL="342900" indent="-342900">
-              <a:buFont typeface="+mj-lt"/>
-              <a:buAutoNum type="arabicPeriod"/>
+              <a:rPr lang="en-US" sz="2400" dirty="0"/>
+              <a:t> Gateway</a:t>
+            </a:r>
+          </a:p>
+          <a:p>
+            <a:pPr marL="742950" lvl="1" indent="-285750">
+              <a:buFont typeface="Arial" panose="020B0604020202020204" pitchFamily="34" charset="0"/>
+              <a:buChar char="•"/>
             </a:pPr>
-            <a:endParaRPr lang="en-US" sz="2800" dirty="0"/>
-          </a:p>
-          <a:p>
-            <a:pPr marL="342900" indent="-342900">
-              <a:buFont typeface="+mj-lt"/>
-              <a:buAutoNum type="arabicPeriod"/>
+            <a:r>
+              <a:rPr lang="en-US" sz="2400" dirty="0"/>
+              <a:t>Mesh Extension</a:t>
+            </a:r>
+          </a:p>
+          <a:p>
+            <a:pPr marL="742950" lvl="1" indent="-285750">
+              <a:buFont typeface="Arial" panose="020B0604020202020204" pitchFamily="34" charset="0"/>
+              <a:buChar char="•"/>
             </a:pPr>
             <a:r>
-              <a:rPr lang="en-US" sz="2800" dirty="0"/>
-              <a:t>Reusable connection layer for many use cases: the same mesh channel can power file sync, shared state, remote actions, and future multi-agent workflows, making the core system much more valuable than a single demo feature.</a:t>
-            </a:r>
-          </a:p>
-          <a:p>
+              <a:rPr lang="en-US" sz="2400" dirty="0"/>
+              <a:t>Discovery: subnet scan + </a:t>
+            </a:r>
+            <a:r>
+              <a:rPr lang="en-US" sz="2400" dirty="0" err="1"/>
+              <a:t>mDNS</a:t>
+            </a:r>
+            <a:endParaRPr lang="en-US" sz="2400" dirty="0"/>
+          </a:p>
+          <a:p>
+            <a:pPr marL="742950" lvl="1" indent="-285750">
+              <a:buFont typeface="Arial" panose="020B0604020202020204" pitchFamily="34" charset="0"/>
+              <a:buChar char="•"/>
+            </a:pPr>
+            <a:r>
+              <a:rPr lang="en-US" sz="2400" dirty="0"/>
+              <a:t>Transport: WebSocket approval, manifest exchange, push/pull</a:t>
+            </a:r>
+          </a:p>
+          <a:p>
+            <a:pPr marL="742950" lvl="1" indent="-285750">
+              <a:buFont typeface="Arial" panose="020B0604020202020204" pitchFamily="34" charset="0"/>
+              <a:buChar char="•"/>
+            </a:pPr>
+            <a:r>
+              <a:rPr lang="en-US" sz="2400" dirty="0"/>
+              <a:t>Sync state: hash tracking, pending changes, conflict detection</a:t>
+            </a:r>
+          </a:p>
+          <a:p>
+            <a:pPr marL="742950" lvl="1" indent="-285750">
+              <a:buFont typeface="Arial" panose="020B0604020202020204" pitchFamily="34" charset="0"/>
+              <a:buChar char="•"/>
+            </a:pPr>
+            <a:r>
+              <a:rPr lang="en-US" sz="2400" dirty="0"/>
+              <a:t>File watcher: all files, deletions, binary support, feedback-loop suppression</a:t>
+            </a:r>
+          </a:p>
+          <a:p>
+            <a:pPr marL="742950" lvl="1" indent="-285750">
+              <a:buFont typeface="Arial" panose="020B0604020202020204" pitchFamily="34" charset="0"/>
+              <a:buChar char="•"/>
+            </a:pPr>
+            <a:r>
+              <a:rPr lang="en-US" sz="2400" dirty="0"/>
+              <a:t>Tech stack: TypeScript, Node.js 22+, </a:t>
+            </a:r>
+            <a:r>
+              <a:rPr lang="en-US" sz="2400" dirty="0" err="1"/>
+              <a:t>OpenClaw</a:t>
+            </a:r>
+            <a:r>
+              <a:rPr lang="en-US" sz="2400" dirty="0"/>
+              <a:t> plugin runtime</a:t>
+            </a:r>
+          </a:p>
+          <a:p>
+            <a:br>
+              <a:rPr lang="en-US" dirty="0"/>
+            </a:br>
             <a:endParaRPr lang="en-IN" dirty="0"/>
           </a:p>
         </p:txBody>
@@ -7619,7 +8148,7 @@
     </p:spTree>
     <p:extLst>
       <p:ext uri="{BB962C8B-B14F-4D97-AF65-F5344CB8AC3E}">
-        <p14:creationId xmlns:p14="http://schemas.microsoft.com/office/powerpoint/2010/main" val="1746425801"/>
+        <p14:creationId xmlns:p14="http://schemas.microsoft.com/office/powerpoint/2010/main" val="56678744"/>
       </p:ext>
     </p:extLst>
   </p:cSld>

--- a/RVCE_MergeMind.pptx
+++ b/RVCE_MergeMind.pptx
@@ -5954,7 +5954,7 @@
         <p:spPr>
           <a:xfrm>
             <a:off x="609600" y="1841178"/>
-            <a:ext cx="5570547" cy="369332"/>
+            <a:ext cx="5570547" cy="1200329"/>
           </a:xfrm>
           <a:prstGeom prst="rect">
             <a:avLst/>
@@ -5972,6 +5972,24 @@
                 <a:hlinkClick r:id="rId3"/>
               </a:rPr>
               <a:t>https://github.com/rxchitrx/openclaw-mesh-extension</a:t>
+            </a:r>
+            <a:br>
+              <a:rPr lang="en-US" dirty="0"/>
+            </a:br>
+            <a:br>
+              <a:rPr lang="en-US" dirty="0"/>
+            </a:br>
+            <a:r>
+              <a:rPr lang="en-US" dirty="0"/>
+              <a:t>https://</a:t>
+            </a:r>
+            <a:r>
+              <a:rPr lang="en-US" dirty="0" err="1"/>
+              <a:t>drive.google.com</a:t>
+            </a:r>
+            <a:r>
+              <a:rPr lang="en-US" dirty="0"/>
+              <a:t>/drive/folders/1h6EmILlajb08m-4zhbxEZOVtthdrEanX?usp=sharing</a:t>
             </a:r>
             <a:endParaRPr lang="en-IN" dirty="0"/>
           </a:p>
